--- a/decks/geog-weather-climate/geog-weather-climate_ch4_rain-and-clouds.pptx
+++ b/decks/geog-weather-climate/geog-weather-climate_ch4_rain-and-clouds.pptx
@@ -125,29 +125,29 @@
   <p:extLst>
     <p:ext uri="{521415D9-36F7-43E2-AB2F-B90AF26B5E84}">
       <p14:sectionLst xmlns:p14="http://schemas.microsoft.com/office/powerpoint/2010/main">
-        <p14:section name="Opening" id="{5918be17-f6bd-805c-8de1-030c082aff72}">
+        <p14:section name="Opening" id="{cc19bdcc-c03c-bfab-e549-49bb6dcb6a8a}">
           <p14:sldIdLst>
             <p14:sldId id="256"/>
           </p14:sldIdLst>
         </p14:section>
-        <p14:section name="Gate" id="{9ad398d3-9818-c227-38eb-a39c8e513d2f}">
+        <p14:section name="Gate" id="{3cac3083-981e-a6be-467a-25408f7c59b5}">
           <p14:sldIdLst>
             <p14:sldId id="257"/>
             <p14:sldId id="258"/>
           </p14:sldIdLst>
         </p14:section>
-        <p14:section name="Pre-teach" id="{8a6147db-eccf-64bf-0960-647f97b480ce}">
+        <p14:section name="Pre-teach" id="{04fc8b3c-9d1d-da58-36af-da505a278249}">
           <p14:sldIdLst>
             <p14:sldId id="259"/>
           </p14:sldIdLst>
         </p14:section>
-        <p14:section name="Read-along" id="{64106aa6-d320-71fd-5dd1-d78f540bdc7c}">
+        <p14:section name="Read-along" id="{0f5ad41b-1f71-a264-d099-a07daa0902cc}">
           <p14:sldIdLst>
             <p14:sldId id="260"/>
             <p14:sldId id="261"/>
           </p14:sldIdLst>
         </p14:section>
-        <p14:section name="Teach" id="{cafc2a5b-3824-e213-8ce9-0df659901bf7}">
+        <p14:section name="Teach" id="{7c4ae853-9398-ff55-1b2f-d79173b0dac5}">
           <p14:sldIdLst>
             <p14:sldId id="262"/>
             <p14:sldId id="263"/>
@@ -156,7 +156,7 @@
             <p14:sldId id="266"/>
           </p14:sldIdLst>
         </p14:section>
-        <p14:section name="Routes" id="{7a999e94-758d-96db-1b6e-368083e08060}">
+        <p14:section name="Routes" id="{a1cc7b97-6adb-b187-248c-bb4b6e5b4c2b}">
           <p14:sldIdLst>
             <p14:sldId id="267"/>
             <p14:sldId id="268"/>
@@ -164,12 +164,12 @@
             <p14:sldId id="270"/>
           </p14:sldIdLst>
         </p14:section>
-        <p14:section name="Close" id="{2102cd7b-c0a2-6748-86b3-4037be96d38e}">
+        <p14:section name="Close" id="{1256f441-8cc5-83e7-7502-3a6357cc6dd0}">
           <p14:sldIdLst>
             <p14:sldId id="271"/>
           </p14:sldIdLst>
         </p14:section>
-        <p14:section name="Answers" id="{ffd6982e-780c-165f-902e-2ec5fd287c66}">
+        <p14:section name="Answers" id="{203732e6-f802-a1e9-561a-a6d4a391ba99}">
           <p14:sldIdLst>
             <p14:sldId id="272"/>
             <p14:sldId id="273"/>
